--- a/slides/第08回_入出力・仮想化・クラウド.pptx
+++ b/slides/第08回_入出力・仮想化・クラウド.pptx
@@ -8549,7 +8549,7 @@
         <p:spPr>
           <a:xfrm>
             <a:off x="685800" y="1481328"/>
-            <a:ext cx="10789920" cy="621792"/>
+            <a:ext cx="10789920" cy="365760"/>
           </a:xfrm>
           <a:prstGeom prst="rect">
             <a:avLst/>
@@ -8590,7 +8590,7 @@
         </p:nvSpPr>
         <p:spPr>
           <a:xfrm>
-            <a:off x="685800" y="2139696"/>
+            <a:off x="685800" y="1883664"/>
             <a:ext cx="2526030" cy="1188720"/>
           </a:xfrm>
           <a:prstGeom prst="roundRect">
@@ -8617,7 +8617,7 @@
         </p:nvSpPr>
         <p:spPr>
           <a:xfrm>
-            <a:off x="868680" y="2276856"/>
+            <a:off x="868680" y="2020824"/>
             <a:ext cx="2160270" cy="310896"/>
           </a:xfrm>
           <a:prstGeom prst="rect">
@@ -8656,7 +8656,7 @@
         </p:nvSpPr>
         <p:spPr>
           <a:xfrm>
-            <a:off x="868680" y="2624328"/>
+            <a:off x="868680" y="2368296"/>
             <a:ext cx="2160270" cy="548640"/>
           </a:xfrm>
           <a:prstGeom prst="rect">
@@ -8698,7 +8698,7 @@
         </p:nvSpPr>
         <p:spPr>
           <a:xfrm>
-            <a:off x="3440430" y="2139696"/>
+            <a:off x="3440430" y="1883664"/>
             <a:ext cx="2526030" cy="1188720"/>
           </a:xfrm>
           <a:prstGeom prst="roundRect">
@@ -8725,7 +8725,7 @@
         </p:nvSpPr>
         <p:spPr>
           <a:xfrm>
-            <a:off x="3623310" y="2276856"/>
+            <a:off x="3623310" y="2020824"/>
             <a:ext cx="2160270" cy="310896"/>
           </a:xfrm>
           <a:prstGeom prst="rect">
@@ -8764,7 +8764,7 @@
         </p:nvSpPr>
         <p:spPr>
           <a:xfrm>
-            <a:off x="3623310" y="2624328"/>
+            <a:off x="3623310" y="2368296"/>
             <a:ext cx="2160270" cy="548640"/>
           </a:xfrm>
           <a:prstGeom prst="rect">
@@ -8806,7 +8806,7 @@
         </p:nvSpPr>
         <p:spPr>
           <a:xfrm>
-            <a:off x="6195060" y="2139696"/>
+            <a:off x="6195060" y="1883664"/>
             <a:ext cx="2526030" cy="1188720"/>
           </a:xfrm>
           <a:prstGeom prst="roundRect">
@@ -8833,7 +8833,7 @@
         </p:nvSpPr>
         <p:spPr>
           <a:xfrm>
-            <a:off x="6377940" y="2276856"/>
+            <a:off x="6377940" y="2020824"/>
             <a:ext cx="2160270" cy="310896"/>
           </a:xfrm>
           <a:prstGeom prst="rect">
@@ -8872,7 +8872,7 @@
         </p:nvSpPr>
         <p:spPr>
           <a:xfrm>
-            <a:off x="6377940" y="2624328"/>
+            <a:off x="6377940" y="2368296"/>
             <a:ext cx="2160270" cy="548640"/>
           </a:xfrm>
           <a:prstGeom prst="rect">
@@ -8914,7 +8914,7 @@
         </p:nvSpPr>
         <p:spPr>
           <a:xfrm>
-            <a:off x="8949690" y="2139696"/>
+            <a:off x="8949690" y="1883664"/>
             <a:ext cx="2526030" cy="1188720"/>
           </a:xfrm>
           <a:prstGeom prst="roundRect">
@@ -8941,7 +8941,7 @@
         </p:nvSpPr>
         <p:spPr>
           <a:xfrm>
-            <a:off x="9132570" y="2276856"/>
+            <a:off x="9132570" y="2020824"/>
             <a:ext cx="2160270" cy="310896"/>
           </a:xfrm>
           <a:prstGeom prst="rect">
@@ -8980,7 +8980,7 @@
         </p:nvSpPr>
         <p:spPr>
           <a:xfrm>
-            <a:off x="9132570" y="2624328"/>
+            <a:off x="9132570" y="2368296"/>
             <a:ext cx="2160270" cy="548640"/>
           </a:xfrm>
           <a:prstGeom prst="rect">
@@ -9022,7 +9022,7 @@
         </p:nvSpPr>
         <p:spPr>
           <a:xfrm>
-            <a:off x="685800" y="3621024"/>
+            <a:off x="685800" y="3364992"/>
             <a:ext cx="10789920" cy="786384"/>
           </a:xfrm>
           <a:prstGeom prst="roundRect">
@@ -9049,7 +9049,7 @@
         </p:nvSpPr>
         <p:spPr>
           <a:xfrm>
-            <a:off x="914400" y="3749040"/>
+            <a:off x="914400" y="3493008"/>
             <a:ext cx="10332720" cy="292608"/>
           </a:xfrm>
           <a:prstGeom prst="rect">
@@ -9088,7 +9088,7 @@
         </p:nvSpPr>
         <p:spPr>
           <a:xfrm>
-            <a:off x="914400" y="4059936"/>
+            <a:off x="914400" y="3803904"/>
             <a:ext cx="10332720" cy="292608"/>
           </a:xfrm>
           <a:prstGeom prst="rect">
@@ -22312,7 +22312,7 @@
         <p:spPr>
           <a:xfrm>
             <a:off x="685800" y="1481328"/>
-            <a:ext cx="10789920" cy="621792"/>
+            <a:ext cx="10789920" cy="365760"/>
           </a:xfrm>
           <a:prstGeom prst="rect">
             <a:avLst/>
@@ -22361,53 +22361,14 @@
         </p:blipFill>
         <p:spPr>
           <a:xfrm>
-            <a:off x="3371523" y="2139696"/>
-            <a:ext cx="5418473" cy="3346704"/>
+            <a:off x="3164259" y="1883664"/>
+            <a:ext cx="5833001" cy="3602736"/>
           </a:xfrm>
           <a:prstGeom prst="rect">
             <a:avLst/>
           </a:prstGeom>
         </p:spPr>
       </p:pic>
-      <p:sp>
-        <p:nvSpPr>
-          <p:cNvPr id="7" name="Text 4"/>
-          <p:cNvSpPr/>
-          <p:nvPr/>
-        </p:nvSpPr>
-        <p:spPr>
-          <a:xfrm>
-            <a:off x="685800" y="5687568"/>
-            <a:ext cx="10789920" cy="365760"/>
-          </a:xfrm>
-          <a:prstGeom prst="rect">
-            <a:avLst/>
-          </a:prstGeom>
-          <a:noFill/>
-          <a:ln/>
-        </p:spPr>
-        <p:txBody>
-          <a:bodyPr wrap="square" lIns="0" tIns="0" rIns="0" bIns="0" rtlCol="0" anchor="ctr"/>
-          <a:lstStyle/>
-          <a:p>
-            <a:pPr algn="ctr" indent="0" marL="0">
-              <a:buNone/>
-            </a:pPr>
-            <a:r>
-              <a:rPr lang="en-US" sz="1500" dirty="0">
-                <a:solidFill>
-                  <a:srgbClr val="16191D"/>
-                </a:solidFill>
-                <a:latin typeface="Yu Gothic" pitchFamily="34" charset="0"/>
-                <a:ea typeface="Yu Gothic" pitchFamily="34" charset="-122"/>
-                <a:cs typeface="Yu Gothic" pitchFamily="34" charset="-120"/>
-              </a:rPr>
-              <a:t>CPU が関与するのは、最初の指示と最後の通知だけになる。</a:t>
-            </a:r>
-            <a:endParaRPr lang="en-US" sz="1500" dirty="0"/>
-          </a:p>
-        </p:txBody>
-      </p:sp>
     </p:spTree>
   </p:cSld>
   <p:clrMapOvr>

--- a/slides/第08回_入出力・仮想化・クラウド.pptx
+++ b/slides/第08回_入出力・仮想化・クラウド.pptx
@@ -14459,45 +14459,6 @@
         </p:nvSpPr>
         <p:spPr>
           <a:xfrm>
-            <a:off x="685800" y="5687568"/>
-            <a:ext cx="10789920" cy="365760"/>
-          </a:xfrm>
-          <a:prstGeom prst="rect">
-            <a:avLst/>
-          </a:prstGeom>
-          <a:noFill/>
-          <a:ln/>
-        </p:spPr>
-        <p:txBody>
-          <a:bodyPr wrap="square" lIns="0" tIns="0" rIns="0" bIns="0" rtlCol="0" anchor="ctr"/>
-          <a:lstStyle/>
-          <a:p>
-            <a:pPr algn="ctr" indent="0" marL="0">
-              <a:buNone/>
-            </a:pPr>
-            <a:r>
-              <a:rPr lang="en-US" sz="1500" dirty="0">
-                <a:solidFill>
-                  <a:srgbClr val="16191D"/>
-                </a:solidFill>
-                <a:latin typeface="Yu Gothic" pitchFamily="34" charset="0"/>
-                <a:ea typeface="Yu Gothic" pitchFamily="34" charset="-122"/>
-                <a:cs typeface="Yu Gothic" pitchFamily="34" charset="-120"/>
-              </a:rPr>
-              <a:t>境界が上がるほど、任せる範囲が広い。</a:t>
-            </a:r>
-            <a:endParaRPr lang="en-US" sz="1500" dirty="0"/>
-          </a:p>
-        </p:txBody>
-      </p:sp>
-      <p:sp>
-        <p:nvSpPr>
-          <p:cNvPr id="7" name="Text 4"/>
-          <p:cNvSpPr/>
-          <p:nvPr/>
-        </p:nvSpPr>
-        <p:spPr>
-          <a:xfrm>
             <a:off x="685800" y="6071616"/>
             <a:ext cx="10789920" cy="640080"/>
           </a:xfrm>

--- a/slides/第08回_入出力・仮想化・クラウド.pptx
+++ b/slides/第08回_入出力・仮想化・クラウド.pptx
@@ -15819,7 +15819,7 @@
                 <a:ea typeface="Courier New" pitchFamily="34" charset="-122"/>
                 <a:cs typeface="Courier New" pitchFamily="34" charset="-120"/>
               </a:rPr>
-              <a:t>8-3</a:t>
+              <a:t>8-5</a:t>
             </a:r>
             <a:endParaRPr lang="en-US" sz="1300" dirty="0"/>
           </a:p>
@@ -15927,7 +15927,7 @@
                 <a:ea typeface="Courier New" pitchFamily="34" charset="-122"/>
                 <a:cs typeface="Courier New" pitchFamily="34" charset="-120"/>
               </a:rPr>
-              <a:t>8-4</a:t>
+              <a:t>8-7</a:t>
             </a:r>
             <a:endParaRPr lang="en-US" sz="1300" dirty="0"/>
           </a:p>
